--- a/fixtures/slide-features.pptx
+++ b/fixtures/slide-features.pptx
@@ -109,6 +109,67 @@
           <a:prstGeom prst="line"/>
         </p:spPr>
       </p:cxnSp>
+      <p:grpSp>
+        <p:nvGrpSpPr>
+          <p:cNvPr id="5" name="Group"/>
+          <p:cNvGrpSpPr/>
+          <p:nvPr/>
+        </p:nvGrpSpPr>
+        <p:grpSpPr>
+          <a:xfrm>
+            <a:off x="1828800" y="914400"/>
+            <a:ext cx="1828800" cy="914400"/>
+            <a:chOff x="0" y="0"/>
+            <a:chExt cx="3657600" cy="1828800"/>
+          </a:xfrm>
+        </p:grpSpPr>
+        <p:sp>
+          <p:nvSpPr>
+            <p:cNvPr id="6" name="Grouped"/>
+            <p:cNvSpPr/>
+            <p:nvPr/>
+          </p:nvSpPr>
+          <p:spPr>
+            <a:xfrm>
+              <a:off x="1828800" y="914400"/>
+              <a:ext cx="1828800" cy="457200"/>
+            </a:xfrm>
+            <a:prstGeom prst="rect"/>
+          </p:spPr>
+          <p:txBody>
+            <a:bodyPr/>
+            <a:p>
+              <a:r>
+                <a:rPr sz="1200"/>
+                <a:t>Grouped label</a:t>
+              </a:r>
+            </a:p>
+          </p:txBody>
+        </p:sp>
+      </p:grpSp>
+      <p:sp>
+        <p:nvSpPr>
+          <p:cNvPr id="7" name="Turned"/>
+          <p:cNvSpPr/>
+          <p:nvPr/>
+        </p:nvSpPr>
+        <p:spPr>
+          <a:xfrm rot="5400000">
+            <a:off x="5486400" y="914400"/>
+            <a:ext cx="1828800" cy="457200"/>
+          </a:xfrm>
+          <a:prstGeom prst="rect"/>
+        </p:spPr>
+        <p:txBody>
+          <a:bodyPr/>
+          <a:p>
+            <a:r>
+              <a:rPr sz="1200"/>
+              <a:t>Turned label</a:t>
+            </a:r>
+          </a:p>
+        </p:txBody>
+      </p:sp>
     </p:spTree>
   </p:cSld>
 </p:sld>

--- a/fixtures/slide-features.pptx
+++ b/fixtures/slide-features.pptx
@@ -170,6 +170,37 @@
           </a:p>
         </p:txBody>
       </p:sp>
+      <p:sp>
+        <p:nvSpPr>
+          <p:cNvPr id="8" name="Inherited size"/>
+          <p:cNvSpPr/>
+          <p:nvPr/>
+        </p:nvSpPr>
+        <p:spPr>
+          <a:xfrm>
+            <a:off x="914400" y="3657600"/>
+            <a:ext cx="4572000" cy="914400"/>
+          </a:xfrm>
+          <a:prstGeom prst="rect"/>
+        </p:spPr>
+        <p:txBody>
+          <a:bodyPr/>
+          <a:lstStyle>
+            <a:lvl1pPr>
+              <a:defRPr sz="1000"/>
+            </a:lvl1pPr>
+          </a:lstStyle>
+          <a:p>
+            <a:pPr>
+              <a:defRPr sz="3600"/>
+            </a:pPr>
+            <a:r>
+              <a:rPr lang="en-US"/>
+              <a:t>Inherited size</a:t>
+            </a:r>
+          </a:p>
+        </p:txBody>
+      </p:sp>
     </p:spTree>
   </p:cSld>
 </p:sld>
